--- a/方程的导入.pptx
+++ b/方程的导入.pptx
@@ -3181,7 +3181,7 @@
               </a:defRPr>
             </a:pPr>
             <a:r>
-              <a:t>情境导入:课程导入：生活中的未知数</a:t>
+              <a:t>情境导入-课程导入：生活中的未知数</a:t>
             </a:r>
           </a:p>
         </p:txBody>
@@ -3214,7 +3214,7 @@
               </a:defRPr>
             </a:pPr>
             <a:r>
-              <a:t>同学们，生活中我们常常会遇到一些不知道具体数量的问题。比如：妈妈买了一些苹果，吃掉3个，还剩5个，原来有几个苹果呢？以前我们用算术法计算，今天我们将学习一种新的方法来解决这类问题，它就是我们的新朋友——方程！</a:t>
+              <a:t>    同学们，生活中我们常常会遇到一些不知道具体数量的问题。比如：妈妈买了一些苹果，吃掉3个，还剩5个，原来有几个苹果呢？以前我们用算术法计算，今天我们将学习一种新的方法来解决这类问题，它就是我们的新朋友——方程！</a:t>
             </a:r>
           </a:p>
         </p:txBody>
@@ -3268,7 +3268,7 @@
               </a:defRPr>
             </a:pPr>
             <a:r>
-              <a:t>新知讲解:知识点一：用字母表示数</a:t>
+              <a:t>新知讲解-知识点一：用字母表示数</a:t>
             </a:r>
           </a:p>
         </p:txBody>
@@ -3301,7 +3301,7 @@
               </a:defRPr>
             </a:pPr>
             <a:r>
-              <a:t>在数学中，我们可以用任意字母（如a, b, x, y）来表示未知的数。这能让复杂的数量关系变得简洁。</a:t>
+              <a:t>    在数学中，我们可以用任意字母（如a, b, x, y）来表示未知的数。这能让复杂的数量关系变得简洁。</a:t>
             </a:r>
           </a:p>
           <a:p>
@@ -3311,7 +3311,7 @@
               </a:defRPr>
             </a:pPr>
             <a:r>
-              <a:t>核心规则：字母与数字相乘时，省略乘号，数字在前，如3×x写成3x。</a:t>
+              <a:t>    核心规则：字母与数字相乘时，省略乘号，数字在前，如3×x写成3x。</a:t>
             </a:r>
           </a:p>
           <a:p>
@@ -3321,7 +3321,7 @@
               </a:defRPr>
             </a:pPr>
             <a:r>
-              <a:t>例题1：小明有x支铅笔，小红比他多2支，小红有(x+2)支；小刚的橡皮是小明的4倍，小刚有4y块橡皮。</a:t>
+              <a:t>    例题1：小明有x支铅笔，小红比他多2支，小红有(x+2)支；小刚的橡皮是小明的4倍，小刚有4y块橡皮。</a:t>
             </a:r>
           </a:p>
         </p:txBody>
@@ -3375,7 +3375,7 @@
               </a:defRPr>
             </a:pPr>
             <a:r>
-              <a:t>新知讲解:知识点二：认识等量关系</a:t>
+              <a:t>新知讲解-知识点二：认识等量关系</a:t>
             </a:r>
           </a:p>
         </p:txBody>
@@ -3408,7 +3408,7 @@
               </a:defRPr>
             </a:pPr>
             <a:r>
-              <a:t>等量关系是指两个数量相等的关系，是列方程的依据。就像天平平衡时，左右两边重量相等。</a:t>
+              <a:t>    等量关系是指两个数量相等的关系，是列方程的依据。就像天平平衡时，左右两边重量相等。</a:t>
             </a:r>
           </a:p>
           <a:p>
@@ -3418,7 +3418,7 @@
               </a:defRPr>
             </a:pPr>
             <a:r>
-              <a:t>简单说，就是“左边数量 = 右边数量”。</a:t>
+              <a:t>    简单说，就是“左边数量 = 右边数量”。</a:t>
             </a:r>
           </a:p>
           <a:p>
@@ -3428,7 +3428,7 @@
               </a:defRPr>
             </a:pPr>
             <a:r>
-              <a:t>例题2：一个空水杯重100克，装入水后总重250克。等量关系是：空水杯质量 + 水的质量 = 总质量。设水的质量为x克，可表示为：100 + x = 250。</a:t>
+              <a:t>    例题2：一个空水杯重100克，装入水后总重250克。等量关系是：空水杯质量 + 水的质量 = 总质量。设水的质量为x克，可表示为：100 + x = 250。</a:t>
             </a:r>
           </a:p>
         </p:txBody>
@@ -3482,7 +3482,7 @@
               </a:defRPr>
             </a:pPr>
             <a:r>
-              <a:t>新知讲解:知识点三：方程的概念</a:t>
+              <a:t>新知讲解-知识点三：方程的概念</a:t>
             </a:r>
           </a:p>
         </p:txBody>
@@ -3515,7 +3515,7 @@
               </a:defRPr>
             </a:pPr>
             <a:r>
-              <a:t>定义：含有未知数的等式叫做方程。</a:t>
+              <a:t>    定义：含有未知数的等式叫做方程。</a:t>
             </a:r>
           </a:p>
           <a:p>
@@ -3525,7 +3525,7 @@
               </a:defRPr>
             </a:pPr>
             <a:r>
-              <a:t>必须同时满足两个条件：</a:t>
+              <a:t>    必须同时满足两个条件：</a:t>
             </a:r>
           </a:p>
           <a:p>
@@ -3535,7 +3535,7 @@
               </a:defRPr>
             </a:pPr>
             <a:r>
-              <a:t>1. 是等式（有等号）</a:t>
+              <a:t>    1. 是等式（有等号）</a:t>
             </a:r>
           </a:p>
           <a:p>
@@ -3545,7 +3545,7 @@
               </a:defRPr>
             </a:pPr>
             <a:r>
-              <a:t>2. 含有未知数（字母）</a:t>
+              <a:t>    2. 含有未知数（字母）</a:t>
             </a:r>
           </a:p>
           <a:p>
@@ -3555,7 +3555,7 @@
               </a:defRPr>
             </a:pPr>
             <a:r>
-              <a:t>例题3：判断下列式子是否为方程？</a:t>
+              <a:t>    例题3：判断下列式子是否为方程？</a:t>
             </a:r>
           </a:p>
           <a:p>
@@ -3565,7 +3565,7 @@
               </a:defRPr>
             </a:pPr>
             <a:r>
-              <a:t>① 30+x=50 （是，有等号、有未知数）</a:t>
+              <a:t>    ① 30+x=50 （是，有等号、有未知数）</a:t>
             </a:r>
           </a:p>
           <a:p>
@@ -3575,7 +3575,7 @@
               </a:defRPr>
             </a:pPr>
             <a:r>
-              <a:t>② 20+30=50 （否，无未知数）</a:t>
+              <a:t>    ② 20+30=50 （否，无未知数）</a:t>
             </a:r>
           </a:p>
           <a:p>
@@ -3585,7 +3585,7 @@
               </a:defRPr>
             </a:pPr>
             <a:r>
-              <a:t>③ 4x+6    （否，无等号）</a:t>
+              <a:t>    ③ 4x+6    （否，无等号）</a:t>
             </a:r>
           </a:p>
         </p:txBody>
@@ -3639,7 +3639,7 @@
               </a:defRPr>
             </a:pPr>
             <a:r>
-              <a:t>课堂巩固:巩固练习：基础题</a:t>
+              <a:t>课堂巩固-巩固练习：基础题</a:t>
             </a:r>
           </a:p>
         </p:txBody>
@@ -3672,7 +3672,7 @@
               </a:defRPr>
             </a:pPr>
             <a:r>
-              <a:t>1. 用字母表示数量：</a:t>
+              <a:t>    1. 用字母表示数量：</a:t>
             </a:r>
           </a:p>
           <a:p>
@@ -3682,7 +3682,7 @@
               </a:defRPr>
             </a:pPr>
             <a:r>
-              <a:t>一本书80页，乐乐看了a页，还剩（ ）页。</a:t>
+              <a:t>    一本书80页，乐乐看了a页，还剩（ ）页。</a:t>
             </a:r>
           </a:p>
           <a:p>
@@ -3692,7 +3692,7 @@
               </a:defRPr>
             </a:pPr>
             <a:r>
-              <a:t>每分钟走60米，走了t分钟，一共走（ ）米。</a:t>
+              <a:t>    每分钟走60米，走了t分钟，一共走（ ）米。</a:t>
             </a:r>
           </a:p>
           <a:p>
@@ -3701,6 +3701,9 @@
                 <a:latin typeface="微软雅黑"/>
               </a:defRPr>
             </a:pPr>
+            <a:r>
+              <a:t>    </a:t>
+            </a:r>
           </a:p>
           <a:p>
             <a:pPr>
@@ -3709,7 +3712,7 @@
               </a:defRPr>
             </a:pPr>
             <a:r>
-              <a:t>2. 写出情境等量关系：</a:t>
+              <a:t>    2. 写出情境等量关系：</a:t>
             </a:r>
           </a:p>
           <a:p>
@@ -3719,7 +3722,7 @@
               </a:defRPr>
             </a:pPr>
             <a:r>
-              <a:t>班级原有45人，转来x人，现在有48人。</a:t>
+              <a:t>    班级原有45人，转来x人，现在有48人。</a:t>
             </a:r>
           </a:p>
           <a:p>
@@ -3728,6 +3731,9 @@
                 <a:latin typeface="微软雅黑"/>
               </a:defRPr>
             </a:pPr>
+            <a:r>
+              <a:t>    </a:t>
+            </a:r>
           </a:p>
           <a:p>
             <a:pPr>
@@ -3736,7 +3742,7 @@
               </a:defRPr>
             </a:pPr>
             <a:r>
-              <a:t>3. 判断对错：</a:t>
+              <a:t>    3. 判断对错：</a:t>
             </a:r>
           </a:p>
           <a:p>
@@ -3746,7 +3752,7 @@
               </a:defRPr>
             </a:pPr>
             <a:r>
-              <a:t>① 含有字母的式子叫方程。（ ）</a:t>
+              <a:t>    ① 含有字母的式子叫方程。（ ）</a:t>
             </a:r>
           </a:p>
           <a:p>
@@ -3756,7 +3762,7 @@
               </a:defRPr>
             </a:pPr>
             <a:r>
-              <a:t>② 方程一定是等式。（ ）</a:t>
+              <a:t>    ② 方程一定是等式。（ ）</a:t>
             </a:r>
           </a:p>
         </p:txBody>
@@ -3810,7 +3816,7 @@
               </a:defRPr>
             </a:pPr>
             <a:r>
-              <a:t>课堂巩固:巩固练习：提升题</a:t>
+              <a:t>课堂巩固-巩固练习：提升题</a:t>
             </a:r>
           </a:p>
         </p:txBody>
@@ -3843,7 +3849,7 @@
               </a:defRPr>
             </a:pPr>
             <a:r>
-              <a:t>根据题意列方程：</a:t>
+              <a:t>    根据题意列方程：</a:t>
             </a:r>
           </a:p>
           <a:p>
@@ -3853,7 +3859,7 @@
               </a:defRPr>
             </a:pPr>
             <a:r>
-              <a:t>商店运来8箱苹果，每箱x千克，卖出40千克后，还剩24千克。</a:t>
+              <a:t>    商店运来8箱苹果，每箱x千克，卖出40千克后，还剩24千克。</a:t>
             </a:r>
           </a:p>
           <a:p>
@@ -3862,6 +3868,9 @@
                 <a:latin typeface="微软雅黑"/>
               </a:defRPr>
             </a:pPr>
+            <a:r>
+              <a:t>    </a:t>
+            </a:r>
           </a:p>
           <a:p>
             <a:pPr>
@@ -3870,7 +3879,7 @@
               </a:defRPr>
             </a:pPr>
             <a:r>
-              <a:t>请思考：题目中的等量关系是什么？</a:t>
+              <a:t>    请思考：题目中的等量关系是什么？</a:t>
             </a:r>
           </a:p>
           <a:p>
@@ -3880,7 +3889,7 @@
               </a:defRPr>
             </a:pPr>
             <a:r>
-              <a:t>（提示：运来的总重量 - 卖出的重量 = 剩下的重量）</a:t>
+              <a:t>    （提示：运来的总重量 - 卖出的重量 = 剩下的重量）</a:t>
             </a:r>
           </a:p>
         </p:txBody>
@@ -3934,7 +3943,7 @@
               </a:defRPr>
             </a:pPr>
             <a:r>
-              <a:t>课堂小结:本课总结</a:t>
+              <a:t>课堂小结-本课总结</a:t>
             </a:r>
           </a:p>
         </p:txBody>
@@ -3967,7 +3976,7 @@
               </a:defRPr>
             </a:pPr>
             <a:r>
-              <a:t>今天我们学习了三个核心知识点：</a:t>
+              <a:t>    今天我们学习了三个核心知识点：</a:t>
             </a:r>
           </a:p>
           <a:p>
@@ -3977,7 +3986,7 @@
               </a:defRPr>
             </a:pPr>
             <a:r>
-              <a:t>1. 用字母可以表示未知数量和数量关系。</a:t>
+              <a:t>    1. 用字母可以表示未知数量和数量关系。</a:t>
             </a:r>
           </a:p>
           <a:p>
@@ -3987,7 +3996,7 @@
               </a:defRPr>
             </a:pPr>
             <a:r>
-              <a:t>2. 等量关系是两组相等的数量，是列方程的基础。</a:t>
+              <a:t>    2. 等量关系是两组相等的数量，是列方程的基础。</a:t>
             </a:r>
           </a:p>
           <a:p>
@@ -3997,7 +4006,7 @@
               </a:defRPr>
             </a:pPr>
             <a:r>
-              <a:t>3. 含有未知数的等式就是方程，牢记“等式+未知数”两大核心特征。</a:t>
+              <a:t>    3. 含有未知数的等式就是方程，牢记“等式+未知数”两大核心特征。</a:t>
             </a:r>
           </a:p>
         </p:txBody>
@@ -4051,7 +4060,7 @@
               </a:defRPr>
             </a:pPr>
             <a:r>
-              <a:t>课堂小结:谢谢观看</a:t>
+              <a:t>课堂小结-谢谢观看</a:t>
             </a:r>
           </a:p>
         </p:txBody>
@@ -4084,7 +4093,7 @@
               </a:defRPr>
             </a:pPr>
             <a:r>
-              <a:t>同学们表现得非常棒！希望大家课后多多练习，熟练掌握今天所学的知识。下课！</a:t>
+              <a:t>    同学们表现得非常棒！希望大家课后多多练习，熟练掌握今天所学的知识。下课！</a:t>
             </a:r>
           </a:p>
         </p:txBody>
